--- a/IE0005_M1_M5_Presentation.pptx
+++ b/IE0005_M1_M5_Presentation.pptx
@@ -690,7 +690,7 @@
           <a:lstStyle xmlns:a="http://schemas.openxmlformats.org/drawingml/2006/main"/>
           <a:p xmlns:a="http://schemas.openxmlformats.org/drawingml/2006/main">
             <a:r>
-              <a:t>75 seconds. Retain the source notebook's stratified 80/20 split, seed 42. Normalized repeated descriptions are deduplicated first. Five-fold cross-validation on the training set selects alpha from 0.1, 0.5, 1 and 2. Vectorization is inside each pipeline and learns only on that fold's training rows. The test set never tunes alpha.</a:t>
+              <a:t>75 seconds. Retain the source notebook's stratified 80/20 split, seed 42. Exact repeated descriptions are deduplicated first. Five-fold cross-validation on the training set selects alpha from 0.1, 0.5, 1 and 2. Vectorization is inside each pipeline and learns only on that fold's training rows. The test set never tunes alpha.</a:t>
             </a:r>
           </a:p>
           <a:p xmlns:a="http://schemas.openxmlformats.org/drawingml/2006/main">
